--- a/originals/Old files/UA Tutorials/UAClusterIb2dIBAMR.pptx
+++ b/originals/Old files/UA Tutorials/UAClusterIb2dIBAMR.pptx
@@ -9759,10 +9759,8 @@
           </a:p>
           <a:p>
             <a:r>
-              <a:rPr lang="en-US" dirty="0">
-                <a:hlinkClick r:id="rId3"/>
-              </a:rPr>
-              <a:t>https://drive.google.com/drive/folders/1g0TIf-mRa3f2cOt2h8zztOmrhvMdZpuY?usp=sharing</a:t>
+              <a:rPr lang="en-US" dirty="0"/>
+              <a:t>[link removed]</a:t>
             </a:r>
             <a:endParaRPr lang="en-US" dirty="0"/>
           </a:p>
@@ -10094,10 +10092,8 @@
           <a:p>
             <a:pPr lvl="1"/>
             <a:r>
-              <a:rPr lang="en-US" u="sng" dirty="0">
-                <a:hlinkClick r:id="rId3"/>
-              </a:rPr>
-              <a:t>https://drive.google.com/drive/folders/1g0TIf-mRa3f2cOt2h8zztOmrhvMdZpuY?usp=sharing</a:t>
+              <a:rPr lang="en-US" dirty="0"/>
+              <a:t>[link removed]</a:t>
             </a:r>
             <a:endParaRPr lang="en-US" dirty="0"/>
           </a:p>
